--- a/Figures/WellBeingAnalysis/Radarcharts_combined.pptx
+++ b/Figures/WellBeingAnalysis/Radarcharts_combined.pptx
@@ -104,7 +104,145 @@
       </a:defRPr>
     </a:lvl9pPr>
   </p:defaultTextStyle>
+  <p:extLst>
+    <p:ext uri="{EFAFB233-063F-42B5-8137-9DF3F51BA10A}">
+      <p15:sldGuideLst xmlns:p15="http://schemas.microsoft.com/office/powerpoint/2012/main"/>
+    </p:ext>
+  </p:extLst>
 </p:presentation>
+</file>
+
+<file path=ppt/revisionInfo.xml><?xml version="1.0" encoding="utf-8"?>
+<p1510:revInfo xmlns:a="http://schemas.openxmlformats.org/drawingml/2006/main" xmlns:r="http://schemas.openxmlformats.org/officeDocument/2006/relationships" xmlns:p1510="http://schemas.microsoft.com/office/powerpoint/2015/10/main">
+  <p1510:revLst>
+    <p1510:client id="{615DDA26-AB82-4226-B15D-05BECA4AE30C}" v="11" dt="2025-10-16T13:28:15.892"/>
+  </p1510:revLst>
+</p1510:revInfo>
+</file>
+
+<file path=ppt/changesInfos/changesInfo1.xml><?xml version="1.0" encoding="utf-8"?>
+<pc:chgInfo xmlns:a="http://schemas.openxmlformats.org/drawingml/2006/main" xmlns:r="http://schemas.openxmlformats.org/officeDocument/2006/relationships" xmlns:ac="http://schemas.microsoft.com/office/drawing/2013/main/command" xmlns:pc="http://schemas.microsoft.com/office/powerpoint/2013/main/command">
+  <pc:docChgLst>
+    <pc:chgData name="Aske Banke" userId="1c3256d208fb6548" providerId="LiveId" clId="{7C94584A-45EB-4902-B10D-A3B132B74D29}"/>
+    <pc:docChg chg="modSld">
+      <pc:chgData name="Aske Banke" userId="1c3256d208fb6548" providerId="LiveId" clId="{7C94584A-45EB-4902-B10D-A3B132B74D29}" dt="2025-10-16T13:28:15.892" v="10" actId="14826"/>
+      <pc:docMkLst>
+        <pc:docMk/>
+      </pc:docMkLst>
+      <pc:sldChg chg="modSp">
+        <pc:chgData name="Aske Banke" userId="1c3256d208fb6548" providerId="LiveId" clId="{7C94584A-45EB-4902-B10D-A3B132B74D29}" dt="2025-10-16T13:28:15.892" v="10" actId="14826"/>
+        <pc:sldMkLst>
+          <pc:docMk/>
+          <pc:sldMk cId="2928730105" sldId="256"/>
+        </pc:sldMkLst>
+        <pc:grpChg chg="mod">
+          <ac:chgData name="Aske Banke" userId="1c3256d208fb6548" providerId="LiveId" clId="{7C94584A-45EB-4902-B10D-A3B132B74D29}" dt="2025-10-16T13:28:15.892" v="10" actId="14826"/>
+          <ac:grpSpMkLst>
+            <pc:docMk/>
+            <pc:sldMk cId="2928730105" sldId="256"/>
+            <ac:grpSpMk id="50" creationId="{E073045C-F4DE-EB18-BA93-8A7ED6BBFB40}"/>
+          </ac:grpSpMkLst>
+        </pc:grpChg>
+        <pc:grpChg chg="mod">
+          <ac:chgData name="Aske Banke" userId="1c3256d208fb6548" providerId="LiveId" clId="{7C94584A-45EB-4902-B10D-A3B132B74D29}" dt="2025-10-16T13:28:15.892" v="10" actId="14826"/>
+          <ac:grpSpMkLst>
+            <pc:docMk/>
+            <pc:sldMk cId="2928730105" sldId="256"/>
+            <ac:grpSpMk id="51" creationId="{85056089-343E-1D31-CACD-1271730819FC}"/>
+          </ac:grpSpMkLst>
+        </pc:grpChg>
+        <pc:picChg chg="mod">
+          <ac:chgData name="Aske Banke" userId="1c3256d208fb6548" providerId="LiveId" clId="{7C94584A-45EB-4902-B10D-A3B132B74D29}" dt="2025-10-16T13:26:50.194" v="0" actId="14826"/>
+          <ac:picMkLst>
+            <pc:docMk/>
+            <pc:sldMk cId="2928730105" sldId="256"/>
+            <ac:picMk id="27" creationId="{607EF7E0-F227-3C1A-31E3-F1A33622B09D}"/>
+          </ac:picMkLst>
+        </pc:picChg>
+        <pc:picChg chg="mod">
+          <ac:chgData name="Aske Banke" userId="1c3256d208fb6548" providerId="LiveId" clId="{7C94584A-45EB-4902-B10D-A3B132B74D29}" dt="2025-10-16T13:26:58.922" v="1" actId="14826"/>
+          <ac:picMkLst>
+            <pc:docMk/>
+            <pc:sldMk cId="2928730105" sldId="256"/>
+            <ac:picMk id="29" creationId="{147EE75E-6492-4001-1FC3-BEC8A26BAC3C}"/>
+          </ac:picMkLst>
+        </pc:picChg>
+        <pc:picChg chg="mod">
+          <ac:chgData name="Aske Banke" userId="1c3256d208fb6548" providerId="LiveId" clId="{7C94584A-45EB-4902-B10D-A3B132B74D29}" dt="2025-10-16T13:27:14.630" v="2" actId="14826"/>
+          <ac:picMkLst>
+            <pc:docMk/>
+            <pc:sldMk cId="2928730105" sldId="256"/>
+            <ac:picMk id="31" creationId="{DF16A4FA-7A2D-CCA8-3C55-3ADAD76D49CF}"/>
+          </ac:picMkLst>
+        </pc:picChg>
+        <pc:picChg chg="mod">
+          <ac:chgData name="Aske Banke" userId="1c3256d208fb6548" providerId="LiveId" clId="{7C94584A-45EB-4902-B10D-A3B132B74D29}" dt="2025-10-16T13:28:15.892" v="10" actId="14826"/>
+          <ac:picMkLst>
+            <pc:docMk/>
+            <pc:sldMk cId="2928730105" sldId="256"/>
+            <ac:picMk id="33" creationId="{B7ACD403-2D42-59AB-A9ED-D8D31281FC10}"/>
+          </ac:picMkLst>
+        </pc:picChg>
+        <pc:picChg chg="mod">
+          <ac:chgData name="Aske Banke" userId="1c3256d208fb6548" providerId="LiveId" clId="{7C94584A-45EB-4902-B10D-A3B132B74D29}" dt="2025-10-16T13:28:15.892" v="10" actId="14826"/>
+          <ac:picMkLst>
+            <pc:docMk/>
+            <pc:sldMk cId="2928730105" sldId="256"/>
+            <ac:picMk id="35" creationId="{A04D616D-FA50-0451-89A8-F7D5254A7484}"/>
+          </ac:picMkLst>
+        </pc:picChg>
+        <pc:picChg chg="mod">
+          <ac:chgData name="Aske Banke" userId="1c3256d208fb6548" providerId="LiveId" clId="{7C94584A-45EB-4902-B10D-A3B132B74D29}" dt="2025-10-16T13:28:15.892" v="10" actId="14826"/>
+          <ac:picMkLst>
+            <pc:docMk/>
+            <pc:sldMk cId="2928730105" sldId="256"/>
+            <ac:picMk id="37" creationId="{A5B2D1D4-44B8-3D0A-FD22-0F668F2DC746}"/>
+          </ac:picMkLst>
+        </pc:picChg>
+        <pc:picChg chg="mod">
+          <ac:chgData name="Aske Banke" userId="1c3256d208fb6548" providerId="LiveId" clId="{7C94584A-45EB-4902-B10D-A3B132B74D29}" dt="2025-10-16T13:28:15.892" v="10" actId="14826"/>
+          <ac:picMkLst>
+            <pc:docMk/>
+            <pc:sldMk cId="2928730105" sldId="256"/>
+            <ac:picMk id="39" creationId="{A50F4D04-F764-4FF9-9B25-1F4A575F753F}"/>
+          </ac:picMkLst>
+        </pc:picChg>
+        <pc:picChg chg="mod">
+          <ac:chgData name="Aske Banke" userId="1c3256d208fb6548" providerId="LiveId" clId="{7C94584A-45EB-4902-B10D-A3B132B74D29}" dt="2025-10-16T13:28:15.892" v="10" actId="14826"/>
+          <ac:picMkLst>
+            <pc:docMk/>
+            <pc:sldMk cId="2928730105" sldId="256"/>
+            <ac:picMk id="41" creationId="{2CFD3D90-0127-CC77-578E-CEA0A4E00126}"/>
+          </ac:picMkLst>
+        </pc:picChg>
+        <pc:picChg chg="mod">
+          <ac:chgData name="Aske Banke" userId="1c3256d208fb6548" providerId="LiveId" clId="{7C94584A-45EB-4902-B10D-A3B132B74D29}" dt="2025-10-16T13:28:15.892" v="10" actId="14826"/>
+          <ac:picMkLst>
+            <pc:docMk/>
+            <pc:sldMk cId="2928730105" sldId="256"/>
+            <ac:picMk id="43" creationId="{1F07A5C8-BDA1-7199-5F3E-D3B08647002C}"/>
+          </ac:picMkLst>
+        </pc:picChg>
+        <pc:picChg chg="mod">
+          <ac:chgData name="Aske Banke" userId="1c3256d208fb6548" providerId="LiveId" clId="{7C94584A-45EB-4902-B10D-A3B132B74D29}" dt="2025-10-16T13:28:15.892" v="10" actId="14826"/>
+          <ac:picMkLst>
+            <pc:docMk/>
+            <pc:sldMk cId="2928730105" sldId="256"/>
+            <ac:picMk id="45" creationId="{35DB56F3-7C38-E29D-F1FE-492DAD68A498}"/>
+          </ac:picMkLst>
+        </pc:picChg>
+        <pc:picChg chg="mod">
+          <ac:chgData name="Aske Banke" userId="1c3256d208fb6548" providerId="LiveId" clId="{7C94584A-45EB-4902-B10D-A3B132B74D29}" dt="2025-10-16T13:28:15.892" v="10" actId="14826"/>
+          <ac:picMkLst>
+            <pc:docMk/>
+            <pc:sldMk cId="2928730105" sldId="256"/>
+            <ac:picMk id="47" creationId="{5F89D521-B3F6-E471-AF7D-DAF0E8960D73}"/>
+          </ac:picMkLst>
+        </pc:picChg>
+      </pc:sldChg>
+    </pc:docChg>
+  </pc:docChgLst>
+</pc:chgInfo>
 </file>
 
 <file path=ppt/slideLayouts/slideLayout1.xml><?xml version="1.0" encoding="utf-8"?>
@@ -238,7 +376,7 @@
           <a:p>
             <a:fld id="{771F9CFD-3BC0-4963-B012-81B178BD77EE}" type="datetimeFigureOut">
               <a:rPr lang="en-US" smtClean="0"/>
-              <a:t>9/30/2025</a:t>
+              <a:t>10/16/2025</a:t>
             </a:fld>
             <a:endParaRPr lang="en-US"/>
           </a:p>
@@ -408,7 +546,7 @@
           <a:p>
             <a:fld id="{771F9CFD-3BC0-4963-B012-81B178BD77EE}" type="datetimeFigureOut">
               <a:rPr lang="en-US" smtClean="0"/>
-              <a:t>9/30/2025</a:t>
+              <a:t>10/16/2025</a:t>
             </a:fld>
             <a:endParaRPr lang="en-US"/>
           </a:p>
@@ -588,7 +726,7 @@
           <a:p>
             <a:fld id="{771F9CFD-3BC0-4963-B012-81B178BD77EE}" type="datetimeFigureOut">
               <a:rPr lang="en-US" smtClean="0"/>
-              <a:t>9/30/2025</a:t>
+              <a:t>10/16/2025</a:t>
             </a:fld>
             <a:endParaRPr lang="en-US"/>
           </a:p>
@@ -758,7 +896,7 @@
           <a:p>
             <a:fld id="{771F9CFD-3BC0-4963-B012-81B178BD77EE}" type="datetimeFigureOut">
               <a:rPr lang="en-US" smtClean="0"/>
-              <a:t>9/30/2025</a:t>
+              <a:t>10/16/2025</a:t>
             </a:fld>
             <a:endParaRPr lang="en-US"/>
           </a:p>
@@ -1004,7 +1142,7 @@
           <a:p>
             <a:fld id="{771F9CFD-3BC0-4963-B012-81B178BD77EE}" type="datetimeFigureOut">
               <a:rPr lang="en-US" smtClean="0"/>
-              <a:t>9/30/2025</a:t>
+              <a:t>10/16/2025</a:t>
             </a:fld>
             <a:endParaRPr lang="en-US"/>
           </a:p>
@@ -1236,7 +1374,7 @@
           <a:p>
             <a:fld id="{771F9CFD-3BC0-4963-B012-81B178BD77EE}" type="datetimeFigureOut">
               <a:rPr lang="en-US" smtClean="0"/>
-              <a:t>9/30/2025</a:t>
+              <a:t>10/16/2025</a:t>
             </a:fld>
             <a:endParaRPr lang="en-US"/>
           </a:p>
@@ -1603,7 +1741,7 @@
           <a:p>
             <a:fld id="{771F9CFD-3BC0-4963-B012-81B178BD77EE}" type="datetimeFigureOut">
               <a:rPr lang="en-US" smtClean="0"/>
-              <a:t>9/30/2025</a:t>
+              <a:t>10/16/2025</a:t>
             </a:fld>
             <a:endParaRPr lang="en-US"/>
           </a:p>
@@ -1721,7 +1859,7 @@
           <a:p>
             <a:fld id="{771F9CFD-3BC0-4963-B012-81B178BD77EE}" type="datetimeFigureOut">
               <a:rPr lang="en-US" smtClean="0"/>
-              <a:t>9/30/2025</a:t>
+              <a:t>10/16/2025</a:t>
             </a:fld>
             <a:endParaRPr lang="en-US"/>
           </a:p>
@@ -1816,7 +1954,7 @@
           <a:p>
             <a:fld id="{771F9CFD-3BC0-4963-B012-81B178BD77EE}" type="datetimeFigureOut">
               <a:rPr lang="en-US" smtClean="0"/>
-              <a:t>9/30/2025</a:t>
+              <a:t>10/16/2025</a:t>
             </a:fld>
             <a:endParaRPr lang="en-US"/>
           </a:p>
@@ -2093,7 +2231,7 @@
           <a:p>
             <a:fld id="{771F9CFD-3BC0-4963-B012-81B178BD77EE}" type="datetimeFigureOut">
               <a:rPr lang="en-US" smtClean="0"/>
-              <a:t>9/30/2025</a:t>
+              <a:t>10/16/2025</a:t>
             </a:fld>
             <a:endParaRPr lang="en-US"/>
           </a:p>
@@ -2350,7 +2488,7 @@
           <a:p>
             <a:fld id="{771F9CFD-3BC0-4963-B012-81B178BD77EE}" type="datetimeFigureOut">
               <a:rPr lang="en-US" smtClean="0"/>
-              <a:t>9/30/2025</a:t>
+              <a:t>10/16/2025</a:t>
             </a:fld>
             <a:endParaRPr lang="en-US"/>
           </a:p>
@@ -2563,7 +2701,7 @@
           <a:p>
             <a:fld id="{771F9CFD-3BC0-4963-B012-81B178BD77EE}" type="datetimeFigureOut">
               <a:rPr lang="en-US" smtClean="0"/>
-              <a:t>9/30/2025</a:t>
+              <a:t>10/16/2025</a:t>
             </a:fld>
             <a:endParaRPr lang="en-US"/>
           </a:p>
@@ -2990,9 +3128,8 @@
               </a:ext>
             </a:extLst>
           </a:blip>
-          <a:stretch>
-            <a:fillRect/>
-          </a:stretch>
+          <a:srcRect/>
+          <a:stretch/>
         </p:blipFill>
         <p:spPr>
           <a:xfrm>
@@ -3026,9 +3163,8 @@
               </a:ext>
             </a:extLst>
           </a:blip>
-          <a:stretch>
-            <a:fillRect/>
-          </a:stretch>
+          <a:srcRect/>
+          <a:stretch/>
         </p:blipFill>
         <p:spPr>
           <a:xfrm>
@@ -3062,9 +3198,8 @@
               </a:ext>
             </a:extLst>
           </a:blip>
-          <a:stretch>
-            <a:fillRect/>
-          </a:stretch>
+          <a:srcRect/>
+          <a:stretch/>
         </p:blipFill>
         <p:spPr>
           <a:xfrm>
@@ -3118,9 +3253,8 @@
                 </a:ext>
               </a:extLst>
             </a:blip>
-            <a:stretch>
-              <a:fillRect/>
-            </a:stretch>
+            <a:srcRect/>
+            <a:stretch/>
           </p:blipFill>
           <p:spPr>
             <a:xfrm>
@@ -3174,9 +3308,8 @@
                   </a:ext>
                 </a:extLst>
               </a:blip>
-              <a:stretch>
-                <a:fillRect/>
-              </a:stretch>
+              <a:srcRect/>
+              <a:stretch/>
             </p:blipFill>
             <p:spPr>
               <a:xfrm>
@@ -3230,9 +3363,8 @@
                     </a:ext>
                   </a:extLst>
                 </a:blip>
-                <a:stretch>
-                  <a:fillRect/>
-                </a:stretch>
+                <a:srcRect/>
+                <a:stretch/>
               </p:blipFill>
               <p:spPr>
                 <a:xfrm>
@@ -3286,9 +3418,8 @@
                       </a:ext>
                     </a:extLst>
                   </a:blip>
-                  <a:stretch>
-                    <a:fillRect/>
-                  </a:stretch>
+                  <a:srcRect/>
+                  <a:stretch/>
                 </p:blipFill>
                 <p:spPr>
                   <a:xfrm>
@@ -3322,9 +3453,8 @@
                       </a:ext>
                     </a:extLst>
                   </a:blip>
-                  <a:stretch>
-                    <a:fillRect/>
-                  </a:stretch>
+                  <a:srcRect/>
+                  <a:stretch/>
                 </p:blipFill>
                 <p:spPr>
                   <a:xfrm>
@@ -3359,9 +3489,8 @@
                     </a:ext>
                   </a:extLst>
                 </a:blip>
-                <a:stretch>
-                  <a:fillRect/>
-                </a:stretch>
+                <a:srcRect/>
+                <a:stretch/>
               </p:blipFill>
               <p:spPr>
                 <a:xfrm>
@@ -3396,9 +3525,8 @@
                   </a:ext>
                 </a:extLst>
               </a:blip>
-              <a:stretch>
-                <a:fillRect/>
-              </a:stretch>
+              <a:srcRect/>
+              <a:stretch/>
             </p:blipFill>
             <p:spPr>
               <a:xfrm>
@@ -3433,9 +3561,8 @@
                 </a:ext>
               </a:extLst>
             </a:blip>
-            <a:stretch>
-              <a:fillRect/>
-            </a:stretch>
+            <a:srcRect/>
+            <a:stretch/>
           </p:blipFill>
           <p:spPr>
             <a:xfrm>

--- a/Figures/WellBeingAnalysis/Radarcharts_combined.pptx
+++ b/Figures/WellBeingAnalysis/Radarcharts_combined.pptx
@@ -376,7 +376,7 @@
           <a:p>
             <a:fld id="{771F9CFD-3BC0-4963-B012-81B178BD77EE}" type="datetimeFigureOut">
               <a:rPr lang="en-US" smtClean="0"/>
-              <a:t>10/16/2025</a:t>
+              <a:t>11/18/2025</a:t>
             </a:fld>
             <a:endParaRPr lang="en-US"/>
           </a:p>
@@ -546,7 +546,7 @@
           <a:p>
             <a:fld id="{771F9CFD-3BC0-4963-B012-81B178BD77EE}" type="datetimeFigureOut">
               <a:rPr lang="en-US" smtClean="0"/>
-              <a:t>10/16/2025</a:t>
+              <a:t>11/18/2025</a:t>
             </a:fld>
             <a:endParaRPr lang="en-US"/>
           </a:p>
@@ -726,7 +726,7 @@
           <a:p>
             <a:fld id="{771F9CFD-3BC0-4963-B012-81B178BD77EE}" type="datetimeFigureOut">
               <a:rPr lang="en-US" smtClean="0"/>
-              <a:t>10/16/2025</a:t>
+              <a:t>11/18/2025</a:t>
             </a:fld>
             <a:endParaRPr lang="en-US"/>
           </a:p>
@@ -896,7 +896,7 @@
           <a:p>
             <a:fld id="{771F9CFD-3BC0-4963-B012-81B178BD77EE}" type="datetimeFigureOut">
               <a:rPr lang="en-US" smtClean="0"/>
-              <a:t>10/16/2025</a:t>
+              <a:t>11/18/2025</a:t>
             </a:fld>
             <a:endParaRPr lang="en-US"/>
           </a:p>
@@ -1142,7 +1142,7 @@
           <a:p>
             <a:fld id="{771F9CFD-3BC0-4963-B012-81B178BD77EE}" type="datetimeFigureOut">
               <a:rPr lang="en-US" smtClean="0"/>
-              <a:t>10/16/2025</a:t>
+              <a:t>11/18/2025</a:t>
             </a:fld>
             <a:endParaRPr lang="en-US"/>
           </a:p>
@@ -1374,7 +1374,7 @@
           <a:p>
             <a:fld id="{771F9CFD-3BC0-4963-B012-81B178BD77EE}" type="datetimeFigureOut">
               <a:rPr lang="en-US" smtClean="0"/>
-              <a:t>10/16/2025</a:t>
+              <a:t>11/18/2025</a:t>
             </a:fld>
             <a:endParaRPr lang="en-US"/>
           </a:p>
@@ -1741,7 +1741,7 @@
           <a:p>
             <a:fld id="{771F9CFD-3BC0-4963-B012-81B178BD77EE}" type="datetimeFigureOut">
               <a:rPr lang="en-US" smtClean="0"/>
-              <a:t>10/16/2025</a:t>
+              <a:t>11/18/2025</a:t>
             </a:fld>
             <a:endParaRPr lang="en-US"/>
           </a:p>
@@ -1859,7 +1859,7 @@
           <a:p>
             <a:fld id="{771F9CFD-3BC0-4963-B012-81B178BD77EE}" type="datetimeFigureOut">
               <a:rPr lang="en-US" smtClean="0"/>
-              <a:t>10/16/2025</a:t>
+              <a:t>11/18/2025</a:t>
             </a:fld>
             <a:endParaRPr lang="en-US"/>
           </a:p>
@@ -1954,7 +1954,7 @@
           <a:p>
             <a:fld id="{771F9CFD-3BC0-4963-B012-81B178BD77EE}" type="datetimeFigureOut">
               <a:rPr lang="en-US" smtClean="0"/>
-              <a:t>10/16/2025</a:t>
+              <a:t>11/18/2025</a:t>
             </a:fld>
             <a:endParaRPr lang="en-US"/>
           </a:p>
@@ -2231,7 +2231,7 @@
           <a:p>
             <a:fld id="{771F9CFD-3BC0-4963-B012-81B178BD77EE}" type="datetimeFigureOut">
               <a:rPr lang="en-US" smtClean="0"/>
-              <a:t>10/16/2025</a:t>
+              <a:t>11/18/2025</a:t>
             </a:fld>
             <a:endParaRPr lang="en-US"/>
           </a:p>
@@ -2488,7 +2488,7 @@
           <a:p>
             <a:fld id="{771F9CFD-3BC0-4963-B012-81B178BD77EE}" type="datetimeFigureOut">
               <a:rPr lang="en-US" smtClean="0"/>
-              <a:t>10/16/2025</a:t>
+              <a:t>11/18/2025</a:t>
             </a:fld>
             <a:endParaRPr lang="en-US"/>
           </a:p>
@@ -2701,7 +2701,7 @@
           <a:p>
             <a:fld id="{771F9CFD-3BC0-4963-B012-81B178BD77EE}" type="datetimeFigureOut">
               <a:rPr lang="en-US" smtClean="0"/>
-              <a:t>10/16/2025</a:t>
+              <a:t>11/18/2025</a:t>
             </a:fld>
             <a:endParaRPr lang="en-US"/>
           </a:p>
@@ -3106,117 +3106,12 @@
           <a:chExt cx="0" cy="0"/>
         </a:xfrm>
       </p:grpSpPr>
-      <p:pic>
-        <p:nvPicPr>
-          <p:cNvPr id="27" name="Picture 26">
+      <p:grpSp>
+        <p:nvGrpSpPr>
+          <p:cNvPr id="8" name="Group 7">
             <a:extLst>
               <a:ext uri="{FF2B5EF4-FFF2-40B4-BE49-F238E27FC236}">
-                <a16:creationId xmlns:a16="http://schemas.microsoft.com/office/drawing/2014/main" id="{607EF7E0-F227-3C1A-31E3-F1A33622B09D}"/>
-              </a:ext>
-            </a:extLst>
-          </p:cNvPr>
-          <p:cNvPicPr>
-            <a:picLocks noChangeAspect="1"/>
-          </p:cNvPicPr>
-          <p:nvPr/>
-        </p:nvPicPr>
-        <p:blipFill>
-          <a:blip r:embed="rId2">
-            <a:extLst>
-              <a:ext uri="{28A0092B-C50C-407E-A947-70E740481C1C}">
-                <a14:useLocalDpi xmlns:a14="http://schemas.microsoft.com/office/drawing/2010/main" val="0"/>
-              </a:ext>
-            </a:extLst>
-          </a:blip>
-          <a:srcRect/>
-          <a:stretch/>
-        </p:blipFill>
-        <p:spPr>
-          <a:xfrm>
-            <a:off x="1753837" y="2430764"/>
-            <a:ext cx="2833500" cy="2833500"/>
-          </a:xfrm>
-          <a:prstGeom prst="rect">
-            <a:avLst/>
-          </a:prstGeom>
-        </p:spPr>
-      </p:pic>
-      <p:pic>
-        <p:nvPicPr>
-          <p:cNvPr id="29" name="Picture 28">
-            <a:extLst>
-              <a:ext uri="{FF2B5EF4-FFF2-40B4-BE49-F238E27FC236}">
-                <a16:creationId xmlns:a16="http://schemas.microsoft.com/office/drawing/2014/main" id="{147EE75E-6492-4001-1FC3-BEC8A26BAC3C}"/>
-              </a:ext>
-            </a:extLst>
-          </p:cNvPr>
-          <p:cNvPicPr>
-            <a:picLocks noChangeAspect="1"/>
-          </p:cNvPicPr>
-          <p:nvPr/>
-        </p:nvPicPr>
-        <p:blipFill>
-          <a:blip r:embed="rId3">
-            <a:extLst>
-              <a:ext uri="{28A0092B-C50C-407E-A947-70E740481C1C}">
-                <a14:useLocalDpi xmlns:a14="http://schemas.microsoft.com/office/drawing/2010/main" val="0"/>
-              </a:ext>
-            </a:extLst>
-          </a:blip>
-          <a:srcRect/>
-          <a:stretch/>
-        </p:blipFill>
-        <p:spPr>
-          <a:xfrm>
-            <a:off x="4330163" y="2430764"/>
-            <a:ext cx="2833500" cy="2833500"/>
-          </a:xfrm>
-          <a:prstGeom prst="rect">
-            <a:avLst/>
-          </a:prstGeom>
-        </p:spPr>
-      </p:pic>
-      <p:pic>
-        <p:nvPicPr>
-          <p:cNvPr id="31" name="Picture 30">
-            <a:extLst>
-              <a:ext uri="{FF2B5EF4-FFF2-40B4-BE49-F238E27FC236}">
-                <a16:creationId xmlns:a16="http://schemas.microsoft.com/office/drawing/2014/main" id="{DF16A4FA-7A2D-CCA8-3C55-3ADAD76D49CF}"/>
-              </a:ext>
-            </a:extLst>
-          </p:cNvPr>
-          <p:cNvPicPr>
-            <a:picLocks noChangeAspect="1"/>
-          </p:cNvPicPr>
-          <p:nvPr/>
-        </p:nvPicPr>
-        <p:blipFill>
-          <a:blip r:embed="rId4">
-            <a:extLst>
-              <a:ext uri="{28A0092B-C50C-407E-A947-70E740481C1C}">
-                <a14:useLocalDpi xmlns:a14="http://schemas.microsoft.com/office/drawing/2010/main" val="0"/>
-              </a:ext>
-            </a:extLst>
-          </a:blip>
-          <a:srcRect/>
-          <a:stretch/>
-        </p:blipFill>
-        <p:spPr>
-          <a:xfrm>
-            <a:off x="6852490" y="2430764"/>
-            <a:ext cx="2833500" cy="2833500"/>
-          </a:xfrm>
-          <a:prstGeom prst="rect">
-            <a:avLst/>
-          </a:prstGeom>
-        </p:spPr>
-      </p:pic>
-      <p:grpSp>
-        <p:nvGrpSpPr>
-          <p:cNvPr id="51" name="Group 50">
-            <a:extLst>
-              <a:ext uri="{FF2B5EF4-FFF2-40B4-BE49-F238E27FC236}">
-                <a16:creationId xmlns:a16="http://schemas.microsoft.com/office/drawing/2014/main" id="{85056089-343E-1D31-CACD-1271730819FC}"/>
+                <a16:creationId xmlns:a16="http://schemas.microsoft.com/office/drawing/2014/main" id="{E53E6596-652E-6CDC-1CD5-2EF39F877CF9}"/>
               </a:ext>
             </a:extLst>
           </p:cNvPr>
@@ -3225,18 +3120,18 @@
         </p:nvGrpSpPr>
         <p:grpSpPr>
           <a:xfrm>
-            <a:off x="512923" y="4836286"/>
-            <a:ext cx="10434231" cy="5425562"/>
-            <a:chOff x="512923" y="4836286"/>
-            <a:chExt cx="10434231" cy="5425562"/>
+            <a:off x="512923" y="2430764"/>
+            <a:ext cx="10434231" cy="7831084"/>
+            <a:chOff x="512923" y="2430764"/>
+            <a:chExt cx="10434231" cy="7831084"/>
           </a:xfrm>
         </p:grpSpPr>
         <p:pic>
           <p:nvPicPr>
-            <p:cNvPr id="39" name="Picture 38">
+            <p:cNvPr id="5" name="Picture 4" descr="A graph of a graph&#10;&#10;AI-generated content may be incorrect.">
               <a:extLst>
                 <a:ext uri="{FF2B5EF4-FFF2-40B4-BE49-F238E27FC236}">
-                  <a16:creationId xmlns:a16="http://schemas.microsoft.com/office/drawing/2014/main" id="{A50F4D04-F764-4FF9-9B25-1F4A575F753F}"/>
+                  <a16:creationId xmlns:a16="http://schemas.microsoft.com/office/drawing/2014/main" id="{35D0D4F8-92D1-228E-FD08-A1AEC891FF48}"/>
                 </a:ext>
               </a:extLst>
             </p:cNvPr>
@@ -3246,7 +3141,81 @@
             <p:nvPr/>
           </p:nvPicPr>
           <p:blipFill>
-            <a:blip r:embed="rId5">
+            <a:blip r:embed="rId2">
+              <a:alphaModFix/>
+              <a:extLst>
+                <a:ext uri="{28A0092B-C50C-407E-A947-70E740481C1C}">
+                  <a14:useLocalDpi xmlns:a14="http://schemas.microsoft.com/office/drawing/2010/main" val="0"/>
+                </a:ext>
+              </a:extLst>
+            </a:blip>
+            <a:stretch>
+              <a:fillRect/>
+            </a:stretch>
+          </p:blipFill>
+          <p:spPr>
+            <a:xfrm>
+              <a:off x="6857171" y="2434706"/>
+              <a:ext cx="2834640" cy="2834640"/>
+            </a:xfrm>
+            <a:prstGeom prst="rect">
+              <a:avLst/>
+            </a:prstGeom>
+          </p:spPr>
+        </p:pic>
+        <p:pic>
+          <p:nvPicPr>
+            <p:cNvPr id="3" name="Picture 2" descr="A graph of a graph&#10;&#10;AI-generated content may be incorrect.">
+              <a:extLst>
+                <a:ext uri="{FF2B5EF4-FFF2-40B4-BE49-F238E27FC236}">
+                  <a16:creationId xmlns:a16="http://schemas.microsoft.com/office/drawing/2014/main" id="{5A136D3A-388B-5016-BA83-3F11E5B2C8B3}"/>
+                </a:ext>
+              </a:extLst>
+            </p:cNvPr>
+            <p:cNvPicPr>
+              <a:picLocks noChangeAspect="1"/>
+            </p:cNvPicPr>
+            <p:nvPr/>
+          </p:nvPicPr>
+          <p:blipFill>
+            <a:blip r:embed="rId3">
+              <a:alphaModFix/>
+              <a:extLst>
+                <a:ext uri="{28A0092B-C50C-407E-A947-70E740481C1C}">
+                  <a14:useLocalDpi xmlns:a14="http://schemas.microsoft.com/office/drawing/2010/main" val="0"/>
+                </a:ext>
+              </a:extLst>
+            </a:blip>
+            <a:stretch>
+              <a:fillRect/>
+            </a:stretch>
+          </p:blipFill>
+          <p:spPr>
+            <a:xfrm>
+              <a:off x="4325824" y="2434706"/>
+              <a:ext cx="2834640" cy="2834640"/>
+            </a:xfrm>
+            <a:prstGeom prst="rect">
+              <a:avLst/>
+            </a:prstGeom>
+          </p:spPr>
+        </p:pic>
+        <p:pic>
+          <p:nvPicPr>
+            <p:cNvPr id="27" name="Picture 26">
+              <a:extLst>
+                <a:ext uri="{FF2B5EF4-FFF2-40B4-BE49-F238E27FC236}">
+                  <a16:creationId xmlns:a16="http://schemas.microsoft.com/office/drawing/2014/main" id="{607EF7E0-F227-3C1A-31E3-F1A33622B09D}"/>
+                </a:ext>
+              </a:extLst>
+            </p:cNvPr>
+            <p:cNvPicPr>
+              <a:picLocks noChangeAspect="1"/>
+            </p:cNvPicPr>
+            <p:nvPr/>
+          </p:nvPicPr>
+          <p:blipFill>
+            <a:blip r:embed="rId4">
               <a:extLst>
                 <a:ext uri="{28A0092B-C50C-407E-A947-70E740481C1C}">
                   <a14:useLocalDpi xmlns:a14="http://schemas.microsoft.com/office/drawing/2010/main" val="0"/>
@@ -3258,7 +3227,7 @@
           </p:blipFill>
           <p:spPr>
             <a:xfrm>
-              <a:off x="8056269" y="4857864"/>
+              <a:off x="1753837" y="2430764"/>
               <a:ext cx="2833500" cy="2833500"/>
             </a:xfrm>
             <a:prstGeom prst="rect">
@@ -3268,10 +3237,10 @@
         </p:pic>
         <p:grpSp>
           <p:nvGrpSpPr>
-            <p:cNvPr id="50" name="Group 49">
+            <p:cNvPr id="51" name="Group 50">
               <a:extLst>
                 <a:ext uri="{FF2B5EF4-FFF2-40B4-BE49-F238E27FC236}">
-                  <a16:creationId xmlns:a16="http://schemas.microsoft.com/office/drawing/2014/main" id="{E073045C-F4DE-EB18-BA93-8A7ED6BBFB40}"/>
+                  <a16:creationId xmlns:a16="http://schemas.microsoft.com/office/drawing/2014/main" id="{85056089-343E-1D31-CACD-1271730819FC}"/>
                 </a:ext>
               </a:extLst>
             </p:cNvPr>
@@ -3281,17 +3250,17 @@
           <p:grpSpPr>
             <a:xfrm>
               <a:off x="512923" y="4836286"/>
-              <a:ext cx="7892404" cy="5425562"/>
+              <a:ext cx="10434231" cy="5425562"/>
               <a:chOff x="512923" y="4836286"/>
-              <a:chExt cx="7892404" cy="5425562"/>
+              <a:chExt cx="10434231" cy="5425562"/>
             </a:xfrm>
           </p:grpSpPr>
           <p:pic>
             <p:nvPicPr>
-              <p:cNvPr id="37" name="Picture 36">
+              <p:cNvPr id="39" name="Picture 38">
                 <a:extLst>
                   <a:ext uri="{FF2B5EF4-FFF2-40B4-BE49-F238E27FC236}">
-                    <a16:creationId xmlns:a16="http://schemas.microsoft.com/office/drawing/2014/main" id="{A5B2D1D4-44B8-3D0A-FD22-0F668F2DC746}"/>
+                    <a16:creationId xmlns:a16="http://schemas.microsoft.com/office/drawing/2014/main" id="{A50F4D04-F764-4FF9-9B25-1F4A575F753F}"/>
                   </a:ext>
                 </a:extLst>
               </p:cNvPr>
@@ -3301,7 +3270,7 @@
               <p:nvPr/>
             </p:nvPicPr>
             <p:blipFill>
-              <a:blip r:embed="rId6">
+              <a:blip r:embed="rId5">
                 <a:extLst>
                   <a:ext uri="{28A0092B-C50C-407E-A947-70E740481C1C}">
                     <a14:useLocalDpi xmlns:a14="http://schemas.microsoft.com/office/drawing/2010/main" val="0"/>
@@ -3313,7 +3282,7 @@
             </p:blipFill>
             <p:spPr>
               <a:xfrm>
-                <a:off x="5566577" y="4847075"/>
+                <a:off x="8056269" y="4857864"/>
                 <a:ext cx="2833500" cy="2833500"/>
               </a:xfrm>
               <a:prstGeom prst="rect">
@@ -3323,10 +3292,10 @@
           </p:pic>
           <p:grpSp>
             <p:nvGrpSpPr>
-              <p:cNvPr id="49" name="Group 48">
+              <p:cNvPr id="50" name="Group 49">
                 <a:extLst>
                   <a:ext uri="{FF2B5EF4-FFF2-40B4-BE49-F238E27FC236}">
-                    <a16:creationId xmlns:a16="http://schemas.microsoft.com/office/drawing/2014/main" id="{65899FD0-9C04-4562-556B-C60A8AFCD0C3}"/>
+                    <a16:creationId xmlns:a16="http://schemas.microsoft.com/office/drawing/2014/main" id="{E073045C-F4DE-EB18-BA93-8A7ED6BBFB40}"/>
                   </a:ext>
                 </a:extLst>
               </p:cNvPr>
@@ -3336,17 +3305,17 @@
             <p:grpSpPr>
               <a:xfrm>
                 <a:off x="512923" y="4836286"/>
-                <a:ext cx="5360327" cy="5425562"/>
+                <a:ext cx="7892404" cy="5425562"/>
                 <a:chOff x="512923" y="4836286"/>
-                <a:chExt cx="5360327" cy="5425562"/>
+                <a:chExt cx="7892404" cy="5425562"/>
               </a:xfrm>
             </p:grpSpPr>
             <p:pic>
               <p:nvPicPr>
-                <p:cNvPr id="35" name="Picture 34">
+                <p:cNvPr id="37" name="Picture 36">
                   <a:extLst>
                     <a:ext uri="{FF2B5EF4-FFF2-40B4-BE49-F238E27FC236}">
-                      <a16:creationId xmlns:a16="http://schemas.microsoft.com/office/drawing/2014/main" id="{A04D616D-FA50-0451-89A8-F7D5254A7484}"/>
+                      <a16:creationId xmlns:a16="http://schemas.microsoft.com/office/drawing/2014/main" id="{A5B2D1D4-44B8-3D0A-FD22-0F668F2DC746}"/>
                     </a:ext>
                   </a:extLst>
                 </p:cNvPr>
@@ -3356,7 +3325,7 @@
                 <p:nvPr/>
               </p:nvPicPr>
               <p:blipFill>
-                <a:blip r:embed="rId7">
+                <a:blip r:embed="rId6">
                   <a:extLst>
                     <a:ext uri="{28A0092B-C50C-407E-A947-70E740481C1C}">
                       <a14:useLocalDpi xmlns:a14="http://schemas.microsoft.com/office/drawing/2010/main" val="0"/>
@@ -3368,7 +3337,7 @@
               </p:blipFill>
               <p:spPr>
                 <a:xfrm>
-                  <a:off x="3039750" y="4836286"/>
+                  <a:off x="5566577" y="4847075"/>
                   <a:ext cx="2833500" cy="2833500"/>
                 </a:xfrm>
                 <a:prstGeom prst="rect">
@@ -3378,10 +3347,10 @@
             </p:pic>
             <p:grpSp>
               <p:nvGrpSpPr>
-                <p:cNvPr id="48" name="Group 47">
+                <p:cNvPr id="49" name="Group 48">
                   <a:extLst>
                     <a:ext uri="{FF2B5EF4-FFF2-40B4-BE49-F238E27FC236}">
-                      <a16:creationId xmlns:a16="http://schemas.microsoft.com/office/drawing/2014/main" id="{19D80BC9-F62F-A6B9-A207-5493851285AC}"/>
+                      <a16:creationId xmlns:a16="http://schemas.microsoft.com/office/drawing/2014/main" id="{65899FD0-9C04-4562-556B-C60A8AFCD0C3}"/>
                     </a:ext>
                   </a:extLst>
                 </p:cNvPr>
@@ -3390,18 +3359,18 @@
               </p:nvGrpSpPr>
               <p:grpSpPr>
                 <a:xfrm>
-                  <a:off x="512923" y="4847075"/>
-                  <a:ext cx="2838000" cy="5378162"/>
-                  <a:chOff x="512923" y="4847075"/>
-                  <a:chExt cx="2838000" cy="5378162"/>
+                  <a:off x="512923" y="4836286"/>
+                  <a:ext cx="5360327" cy="5425562"/>
+                  <a:chOff x="512923" y="4836286"/>
+                  <a:chExt cx="5360327" cy="5425562"/>
                 </a:xfrm>
               </p:grpSpPr>
               <p:pic>
                 <p:nvPicPr>
-                  <p:cNvPr id="33" name="Picture 32">
+                  <p:cNvPr id="35" name="Picture 34">
                     <a:extLst>
                       <a:ext uri="{FF2B5EF4-FFF2-40B4-BE49-F238E27FC236}">
-                        <a16:creationId xmlns:a16="http://schemas.microsoft.com/office/drawing/2014/main" id="{B7ACD403-2D42-59AB-A9ED-D8D31281FC10}"/>
+                        <a16:creationId xmlns:a16="http://schemas.microsoft.com/office/drawing/2014/main" id="{A04D616D-FA50-0451-89A8-F7D5254A7484}"/>
                       </a:ext>
                     </a:extLst>
                   </p:cNvPr>
@@ -3411,7 +3380,7 @@
                   <p:nvPr/>
                 </p:nvPicPr>
                 <p:blipFill>
-                  <a:blip r:embed="rId8">
+                  <a:blip r:embed="rId7">
                     <a:extLst>
                       <a:ext uri="{28A0092B-C50C-407E-A947-70E740481C1C}">
                         <a14:useLocalDpi xmlns:a14="http://schemas.microsoft.com/office/drawing/2010/main" val="0"/>
@@ -3423,7 +3392,7 @@
                 </p:blipFill>
                 <p:spPr>
                   <a:xfrm>
-                    <a:off x="517423" y="4847075"/>
+                    <a:off x="3039750" y="4836286"/>
                     <a:ext cx="2833500" cy="2833500"/>
                   </a:xfrm>
                   <a:prstGeom prst="rect">
@@ -3446,7 +3415,7 @@
                   <p:nvPr/>
                 </p:nvPicPr>
                 <p:blipFill>
-                  <a:blip r:embed="rId9">
+                  <a:blip r:embed="rId8">
                     <a:extLst>
                       <a:ext uri="{28A0092B-C50C-407E-A947-70E740481C1C}">
                         <a14:useLocalDpi xmlns:a14="http://schemas.microsoft.com/office/drawing/2010/main" val="0"/>
@@ -3466,13 +3435,48 @@
                   </a:prstGeom>
                 </p:spPr>
               </p:pic>
+              <p:pic>
+                <p:nvPicPr>
+                  <p:cNvPr id="43" name="Picture 42">
+                    <a:extLst>
+                      <a:ext uri="{FF2B5EF4-FFF2-40B4-BE49-F238E27FC236}">
+                        <a16:creationId xmlns:a16="http://schemas.microsoft.com/office/drawing/2014/main" id="{1F07A5C8-BDA1-7199-5F3E-D3B08647002C}"/>
+                      </a:ext>
+                    </a:extLst>
+                  </p:cNvPr>
+                  <p:cNvPicPr>
+                    <a:picLocks noChangeAspect="1"/>
+                  </p:cNvPicPr>
+                  <p:nvPr/>
+                </p:nvPicPr>
+                <p:blipFill>
+                  <a:blip r:embed="rId9">
+                    <a:extLst>
+                      <a:ext uri="{28A0092B-C50C-407E-A947-70E740481C1C}">
+                        <a14:useLocalDpi xmlns:a14="http://schemas.microsoft.com/office/drawing/2010/main" val="0"/>
+                      </a:ext>
+                    </a:extLst>
+                  </a:blip>
+                  <a:srcRect/>
+                  <a:stretch/>
+                </p:blipFill>
+                <p:spPr>
+                  <a:xfrm>
+                    <a:off x="3024750" y="7428348"/>
+                    <a:ext cx="2833500" cy="2833500"/>
+                  </a:xfrm>
+                  <a:prstGeom prst="rect">
+                    <a:avLst/>
+                  </a:prstGeom>
+                </p:spPr>
+              </p:pic>
             </p:grpSp>
             <p:pic>
               <p:nvPicPr>
-                <p:cNvPr id="43" name="Picture 42">
+                <p:cNvPr id="45" name="Picture 44">
                   <a:extLst>
                     <a:ext uri="{FF2B5EF4-FFF2-40B4-BE49-F238E27FC236}">
-                      <a16:creationId xmlns:a16="http://schemas.microsoft.com/office/drawing/2014/main" id="{1F07A5C8-BDA1-7199-5F3E-D3B08647002C}"/>
+                      <a16:creationId xmlns:a16="http://schemas.microsoft.com/office/drawing/2014/main" id="{35DB56F3-7C38-E29D-F1FE-492DAD68A498}"/>
                     </a:ext>
                   </a:extLst>
                 </p:cNvPr>
@@ -3494,7 +3498,7 @@
               </p:blipFill>
               <p:spPr>
                 <a:xfrm>
-                  <a:off x="3024750" y="7428348"/>
+                  <a:off x="5571827" y="7417559"/>
                   <a:ext cx="2833500" cy="2833500"/>
                 </a:xfrm>
                 <a:prstGeom prst="rect">
@@ -3505,10 +3509,10 @@
           </p:grpSp>
           <p:pic>
             <p:nvPicPr>
-              <p:cNvPr id="45" name="Picture 44">
+              <p:cNvPr id="47" name="Picture 46">
                 <a:extLst>
                   <a:ext uri="{FF2B5EF4-FFF2-40B4-BE49-F238E27FC236}">
-                    <a16:creationId xmlns:a16="http://schemas.microsoft.com/office/drawing/2014/main" id="{35DB56F3-7C38-E29D-F1FE-492DAD68A498}"/>
+                    <a16:creationId xmlns:a16="http://schemas.microsoft.com/office/drawing/2014/main" id="{5F89D521-B3F6-E471-AF7D-DAF0E8960D73}"/>
                   </a:ext>
                 </a:extLst>
               </p:cNvPr>
@@ -3530,7 +3534,7 @@
             </p:blipFill>
             <p:spPr>
               <a:xfrm>
-                <a:off x="5571827" y="7417559"/>
+                <a:off x="8113654" y="7413486"/>
                 <a:ext cx="2833500" cy="2833500"/>
               </a:xfrm>
               <a:prstGeom prst="rect">
@@ -3541,10 +3545,10 @@
         </p:grpSp>
         <p:pic>
           <p:nvPicPr>
-            <p:cNvPr id="47" name="Picture 46">
+            <p:cNvPr id="7" name="Picture 6" descr="A graph of a graph&#10;&#10;AI-generated content may be incorrect.">
               <a:extLst>
                 <a:ext uri="{FF2B5EF4-FFF2-40B4-BE49-F238E27FC236}">
-                  <a16:creationId xmlns:a16="http://schemas.microsoft.com/office/drawing/2014/main" id="{5F89D521-B3F6-E471-AF7D-DAF0E8960D73}"/>
+                  <a16:creationId xmlns:a16="http://schemas.microsoft.com/office/drawing/2014/main" id="{72CB6893-C1E6-7C1E-BB7D-E14E3C28AD3D}"/>
                 </a:ext>
               </a:extLst>
             </p:cNvPr>
@@ -3555,19 +3559,21 @@
           </p:nvPicPr>
           <p:blipFill>
             <a:blip r:embed="rId12">
+              <a:alphaModFix/>
               <a:extLst>
                 <a:ext uri="{28A0092B-C50C-407E-A947-70E740481C1C}">
                   <a14:useLocalDpi xmlns:a14="http://schemas.microsoft.com/office/drawing/2010/main" val="0"/>
                 </a:ext>
               </a:extLst>
             </a:blip>
-            <a:srcRect/>
-            <a:stretch/>
+            <a:stretch>
+              <a:fillRect/>
+            </a:stretch>
           </p:blipFill>
           <p:spPr>
             <a:xfrm>
-              <a:off x="8113654" y="7413486"/>
-              <a:ext cx="2833500" cy="2833500"/>
+              <a:off x="516283" y="4846505"/>
+              <a:ext cx="2834640" cy="2834640"/>
             </a:xfrm>
             <a:prstGeom prst="rect">
               <a:avLst/>
